--- a/ImitationTaikoUI.pptx
+++ b/ImitationTaikoUI.pptx
@@ -262,7 +262,7 @@
           <a:p>
             <a:fld id="{AF7C0022-D722-4CC5-A0B1-D94CF606F81D}" type="datetimeFigureOut">
               <a:rPr lang="zh-CN" altLang="en-US" smtClean="0"/>
-              <a:t>2026/6/5</a:t>
+              <a:t>2026/6/13</a:t>
             </a:fld>
             <a:endParaRPr lang="zh-CN" altLang="en-US"/>
           </a:p>
@@ -460,7 +460,7 @@
           <a:p>
             <a:fld id="{AF7C0022-D722-4CC5-A0B1-D94CF606F81D}" type="datetimeFigureOut">
               <a:rPr lang="zh-CN" altLang="en-US" smtClean="0"/>
-              <a:t>2026/6/5</a:t>
+              <a:t>2026/6/13</a:t>
             </a:fld>
             <a:endParaRPr lang="zh-CN" altLang="en-US"/>
           </a:p>
@@ -668,7 +668,7 @@
           <a:p>
             <a:fld id="{AF7C0022-D722-4CC5-A0B1-D94CF606F81D}" type="datetimeFigureOut">
               <a:rPr lang="zh-CN" altLang="en-US" smtClean="0"/>
-              <a:t>2026/6/5</a:t>
+              <a:t>2026/6/13</a:t>
             </a:fld>
             <a:endParaRPr lang="zh-CN" altLang="en-US"/>
           </a:p>
@@ -866,7 +866,7 @@
           <a:p>
             <a:fld id="{AF7C0022-D722-4CC5-A0B1-D94CF606F81D}" type="datetimeFigureOut">
               <a:rPr lang="zh-CN" altLang="en-US" smtClean="0"/>
-              <a:t>2026/6/5</a:t>
+              <a:t>2026/6/13</a:t>
             </a:fld>
             <a:endParaRPr lang="zh-CN" altLang="en-US"/>
           </a:p>
@@ -1141,7 +1141,7 @@
           <a:p>
             <a:fld id="{AF7C0022-D722-4CC5-A0B1-D94CF606F81D}" type="datetimeFigureOut">
               <a:rPr lang="zh-CN" altLang="en-US" smtClean="0"/>
-              <a:t>2026/6/5</a:t>
+              <a:t>2026/6/13</a:t>
             </a:fld>
             <a:endParaRPr lang="zh-CN" altLang="en-US"/>
           </a:p>
@@ -1406,7 +1406,7 @@
           <a:p>
             <a:fld id="{AF7C0022-D722-4CC5-A0B1-D94CF606F81D}" type="datetimeFigureOut">
               <a:rPr lang="zh-CN" altLang="en-US" smtClean="0"/>
-              <a:t>2026/6/5</a:t>
+              <a:t>2026/6/13</a:t>
             </a:fld>
             <a:endParaRPr lang="zh-CN" altLang="en-US"/>
           </a:p>
@@ -1818,7 +1818,7 @@
           <a:p>
             <a:fld id="{AF7C0022-D722-4CC5-A0B1-D94CF606F81D}" type="datetimeFigureOut">
               <a:rPr lang="zh-CN" altLang="en-US" smtClean="0"/>
-              <a:t>2026/6/5</a:t>
+              <a:t>2026/6/13</a:t>
             </a:fld>
             <a:endParaRPr lang="zh-CN" altLang="en-US"/>
           </a:p>
@@ -1959,7 +1959,7 @@
           <a:p>
             <a:fld id="{AF7C0022-D722-4CC5-A0B1-D94CF606F81D}" type="datetimeFigureOut">
               <a:rPr lang="zh-CN" altLang="en-US" smtClean="0"/>
-              <a:t>2026/6/5</a:t>
+              <a:t>2026/6/13</a:t>
             </a:fld>
             <a:endParaRPr lang="zh-CN" altLang="en-US"/>
           </a:p>
@@ -2072,7 +2072,7 @@
           <a:p>
             <a:fld id="{AF7C0022-D722-4CC5-A0B1-D94CF606F81D}" type="datetimeFigureOut">
               <a:rPr lang="zh-CN" altLang="en-US" smtClean="0"/>
-              <a:t>2026/6/5</a:t>
+              <a:t>2026/6/13</a:t>
             </a:fld>
             <a:endParaRPr lang="zh-CN" altLang="en-US"/>
           </a:p>
@@ -2383,7 +2383,7 @@
           <a:p>
             <a:fld id="{AF7C0022-D722-4CC5-A0B1-D94CF606F81D}" type="datetimeFigureOut">
               <a:rPr lang="zh-CN" altLang="en-US" smtClean="0"/>
-              <a:t>2026/6/5</a:t>
+              <a:t>2026/6/13</a:t>
             </a:fld>
             <a:endParaRPr lang="zh-CN" altLang="en-US"/>
           </a:p>
@@ -2671,7 +2671,7 @@
           <a:p>
             <a:fld id="{AF7C0022-D722-4CC5-A0B1-D94CF606F81D}" type="datetimeFigureOut">
               <a:rPr lang="zh-CN" altLang="en-US" smtClean="0"/>
-              <a:t>2026/6/5</a:t>
+              <a:t>2026/6/13</a:t>
             </a:fld>
             <a:endParaRPr lang="zh-CN" altLang="en-US"/>
           </a:p>
@@ -2912,7 +2912,7 @@
           <a:p>
             <a:fld id="{AF7C0022-D722-4CC5-A0B1-D94CF606F81D}" type="datetimeFigureOut">
               <a:rPr lang="zh-CN" altLang="en-US" smtClean="0"/>
-              <a:t>2026/6/5</a:t>
+              <a:t>2026/6/13</a:t>
             </a:fld>
             <a:endParaRPr lang="zh-CN" altLang="en-US"/>
           </a:p>
@@ -10230,6 +10230,1068 @@
           <a:chExt cx="0" cy="0"/>
         </a:xfrm>
       </p:grpSpPr>
+      <p:grpSp>
+        <p:nvGrpSpPr>
+          <p:cNvPr id="9" name="组合 8">
+            <a:extLst>
+              <a:ext uri="{FF2B5EF4-FFF2-40B4-BE49-F238E27FC236}">
+                <a16:creationId xmlns:a16="http://schemas.microsoft.com/office/drawing/2014/main" id="{6B73F12A-CA30-CCC1-9DE6-E5C2FE7C0110}"/>
+              </a:ext>
+            </a:extLst>
+          </p:cNvPr>
+          <p:cNvGrpSpPr/>
+          <p:nvPr/>
+        </p:nvGrpSpPr>
+        <p:grpSpPr>
+          <a:xfrm>
+            <a:off x="598857" y="411029"/>
+            <a:ext cx="1440000" cy="1440000"/>
+            <a:chOff x="1353600" y="1245600"/>
+            <a:chExt cx="1440000" cy="1440000"/>
+          </a:xfrm>
+        </p:grpSpPr>
+        <p:sp>
+          <p:nvSpPr>
+            <p:cNvPr id="2" name="椭圆 1">
+              <a:extLst>
+                <a:ext uri="{FF2B5EF4-FFF2-40B4-BE49-F238E27FC236}">
+                  <a16:creationId xmlns:a16="http://schemas.microsoft.com/office/drawing/2014/main" id="{CB4D5FB7-2DBD-D319-FE17-B713F6405325}"/>
+                </a:ext>
+              </a:extLst>
+            </p:cNvPr>
+            <p:cNvSpPr/>
+            <p:nvPr/>
+          </p:nvSpPr>
+          <p:spPr>
+            <a:xfrm>
+              <a:off x="1353600" y="1245600"/>
+              <a:ext cx="1440000" cy="1440000"/>
+            </a:xfrm>
+            <a:prstGeom prst="ellipse">
+              <a:avLst/>
+            </a:prstGeom>
+            <a:solidFill>
+              <a:srgbClr val="141311"/>
+            </a:solidFill>
+            <a:ln>
+              <a:noFill/>
+            </a:ln>
+          </p:spPr>
+          <p:style>
+            <a:lnRef idx="2">
+              <a:schemeClr val="accent1">
+                <a:shade val="15000"/>
+              </a:schemeClr>
+            </a:lnRef>
+            <a:fillRef idx="1">
+              <a:schemeClr val="accent1"/>
+            </a:fillRef>
+            <a:effectRef idx="0">
+              <a:schemeClr val="accent1"/>
+            </a:effectRef>
+            <a:fontRef idx="minor">
+              <a:schemeClr val="lt1"/>
+            </a:fontRef>
+          </p:style>
+          <p:txBody>
+            <a:bodyPr rtlCol="0" anchor="ctr"/>
+            <a:lstStyle/>
+            <a:p>
+              <a:pPr algn="ctr"/>
+              <a:endParaRPr lang="zh-CN" altLang="en-US"/>
+            </a:p>
+          </p:txBody>
+        </p:sp>
+        <p:sp>
+          <p:nvSpPr>
+            <p:cNvPr id="7" name="椭圆 6">
+              <a:extLst>
+                <a:ext uri="{FF2B5EF4-FFF2-40B4-BE49-F238E27FC236}">
+                  <a16:creationId xmlns:a16="http://schemas.microsoft.com/office/drawing/2014/main" id="{4EEEE23C-59B5-CFBB-96C3-44D7CE8ACAD9}"/>
+                </a:ext>
+              </a:extLst>
+            </p:cNvPr>
+            <p:cNvSpPr/>
+            <p:nvPr/>
+          </p:nvSpPr>
+          <p:spPr>
+            <a:xfrm>
+              <a:off x="1407600" y="1299600"/>
+              <a:ext cx="1332000" cy="1332000"/>
+            </a:xfrm>
+            <a:prstGeom prst="ellipse">
+              <a:avLst/>
+            </a:prstGeom>
+            <a:solidFill>
+              <a:srgbClr val="F4EFDE"/>
+            </a:solidFill>
+            <a:ln>
+              <a:noFill/>
+            </a:ln>
+          </p:spPr>
+          <p:style>
+            <a:lnRef idx="2">
+              <a:schemeClr val="accent1">
+                <a:shade val="15000"/>
+              </a:schemeClr>
+            </a:lnRef>
+            <a:fillRef idx="1">
+              <a:schemeClr val="accent1"/>
+            </a:fillRef>
+            <a:effectRef idx="0">
+              <a:schemeClr val="accent1"/>
+            </a:effectRef>
+            <a:fontRef idx="minor">
+              <a:schemeClr val="lt1"/>
+            </a:fontRef>
+          </p:style>
+          <p:txBody>
+            <a:bodyPr rtlCol="0" anchor="ctr"/>
+            <a:lstStyle/>
+            <a:p>
+              <a:pPr algn="ctr"/>
+              <a:endParaRPr lang="zh-CN" altLang="en-US"/>
+            </a:p>
+          </p:txBody>
+        </p:sp>
+        <p:sp>
+          <p:nvSpPr>
+            <p:cNvPr id="8" name="椭圆 7">
+              <a:extLst>
+                <a:ext uri="{FF2B5EF4-FFF2-40B4-BE49-F238E27FC236}">
+                  <a16:creationId xmlns:a16="http://schemas.microsoft.com/office/drawing/2014/main" id="{E0ED6912-801B-E73C-14AA-E7F953C6F612}"/>
+                </a:ext>
+              </a:extLst>
+            </p:cNvPr>
+            <p:cNvSpPr/>
+            <p:nvPr/>
+          </p:nvSpPr>
+          <p:spPr>
+            <a:xfrm>
+              <a:off x="1479600" y="1371600"/>
+              <a:ext cx="1188000" cy="1188000"/>
+            </a:xfrm>
+            <a:prstGeom prst="ellipse">
+              <a:avLst/>
+            </a:prstGeom>
+            <a:solidFill>
+              <a:srgbClr val="F24828"/>
+            </a:solidFill>
+            <a:ln>
+              <a:noFill/>
+            </a:ln>
+          </p:spPr>
+          <p:style>
+            <a:lnRef idx="2">
+              <a:schemeClr val="accent1">
+                <a:shade val="15000"/>
+              </a:schemeClr>
+            </a:lnRef>
+            <a:fillRef idx="1">
+              <a:schemeClr val="accent1"/>
+            </a:fillRef>
+            <a:effectRef idx="0">
+              <a:schemeClr val="accent1"/>
+            </a:effectRef>
+            <a:fontRef idx="minor">
+              <a:schemeClr val="lt1"/>
+            </a:fontRef>
+          </p:style>
+          <p:txBody>
+            <a:bodyPr rtlCol="0" anchor="ctr"/>
+            <a:lstStyle/>
+            <a:p>
+              <a:pPr algn="ctr"/>
+              <a:endParaRPr lang="zh-CN" altLang="en-US"/>
+            </a:p>
+          </p:txBody>
+        </p:sp>
+      </p:grpSp>
+      <p:grpSp>
+        <p:nvGrpSpPr>
+          <p:cNvPr id="10" name="组合 9">
+            <a:extLst>
+              <a:ext uri="{FF2B5EF4-FFF2-40B4-BE49-F238E27FC236}">
+                <a16:creationId xmlns:a16="http://schemas.microsoft.com/office/drawing/2014/main" id="{AB56ACFD-1C79-7C68-64AB-8BE213D3C9E1}"/>
+              </a:ext>
+            </a:extLst>
+          </p:cNvPr>
+          <p:cNvGrpSpPr/>
+          <p:nvPr/>
+        </p:nvGrpSpPr>
+        <p:grpSpPr>
+          <a:xfrm>
+            <a:off x="2515025" y="411029"/>
+            <a:ext cx="1440000" cy="1440000"/>
+            <a:chOff x="1353600" y="1245600"/>
+            <a:chExt cx="1440000" cy="1440000"/>
+          </a:xfrm>
+        </p:grpSpPr>
+        <p:sp>
+          <p:nvSpPr>
+            <p:cNvPr id="11" name="椭圆 10">
+              <a:extLst>
+                <a:ext uri="{FF2B5EF4-FFF2-40B4-BE49-F238E27FC236}">
+                  <a16:creationId xmlns:a16="http://schemas.microsoft.com/office/drawing/2014/main" id="{62208739-6662-A094-1EF0-16F86265A952}"/>
+                </a:ext>
+              </a:extLst>
+            </p:cNvPr>
+            <p:cNvSpPr/>
+            <p:nvPr/>
+          </p:nvSpPr>
+          <p:spPr>
+            <a:xfrm>
+              <a:off x="1353600" y="1245600"/>
+              <a:ext cx="1440000" cy="1440000"/>
+            </a:xfrm>
+            <a:prstGeom prst="ellipse">
+              <a:avLst/>
+            </a:prstGeom>
+            <a:solidFill>
+              <a:srgbClr val="141311"/>
+            </a:solidFill>
+            <a:ln>
+              <a:noFill/>
+            </a:ln>
+          </p:spPr>
+          <p:style>
+            <a:lnRef idx="2">
+              <a:schemeClr val="accent1">
+                <a:shade val="15000"/>
+              </a:schemeClr>
+            </a:lnRef>
+            <a:fillRef idx="1">
+              <a:schemeClr val="accent1"/>
+            </a:fillRef>
+            <a:effectRef idx="0">
+              <a:schemeClr val="accent1"/>
+            </a:effectRef>
+            <a:fontRef idx="minor">
+              <a:schemeClr val="lt1"/>
+            </a:fontRef>
+          </p:style>
+          <p:txBody>
+            <a:bodyPr rtlCol="0" anchor="ctr"/>
+            <a:lstStyle/>
+            <a:p>
+              <a:pPr algn="ctr"/>
+              <a:endParaRPr lang="zh-CN" altLang="en-US"/>
+            </a:p>
+          </p:txBody>
+        </p:sp>
+        <p:sp>
+          <p:nvSpPr>
+            <p:cNvPr id="12" name="椭圆 11">
+              <a:extLst>
+                <a:ext uri="{FF2B5EF4-FFF2-40B4-BE49-F238E27FC236}">
+                  <a16:creationId xmlns:a16="http://schemas.microsoft.com/office/drawing/2014/main" id="{816B9B79-E735-11E2-96A8-3FC2AE113BC9}"/>
+                </a:ext>
+              </a:extLst>
+            </p:cNvPr>
+            <p:cNvSpPr/>
+            <p:nvPr/>
+          </p:nvSpPr>
+          <p:spPr>
+            <a:xfrm>
+              <a:off x="1407600" y="1299600"/>
+              <a:ext cx="1332000" cy="1332000"/>
+            </a:xfrm>
+            <a:prstGeom prst="ellipse">
+              <a:avLst/>
+            </a:prstGeom>
+            <a:solidFill>
+              <a:srgbClr val="F4EFDE"/>
+            </a:solidFill>
+            <a:ln>
+              <a:noFill/>
+            </a:ln>
+          </p:spPr>
+          <p:style>
+            <a:lnRef idx="2">
+              <a:schemeClr val="accent1">
+                <a:shade val="15000"/>
+              </a:schemeClr>
+            </a:lnRef>
+            <a:fillRef idx="1">
+              <a:schemeClr val="accent1"/>
+            </a:fillRef>
+            <a:effectRef idx="0">
+              <a:schemeClr val="accent1"/>
+            </a:effectRef>
+            <a:fontRef idx="minor">
+              <a:schemeClr val="lt1"/>
+            </a:fontRef>
+          </p:style>
+          <p:txBody>
+            <a:bodyPr rtlCol="0" anchor="ctr"/>
+            <a:lstStyle/>
+            <a:p>
+              <a:pPr algn="ctr"/>
+              <a:endParaRPr lang="zh-CN" altLang="en-US"/>
+            </a:p>
+          </p:txBody>
+        </p:sp>
+        <p:sp>
+          <p:nvSpPr>
+            <p:cNvPr id="13" name="椭圆 12">
+              <a:extLst>
+                <a:ext uri="{FF2B5EF4-FFF2-40B4-BE49-F238E27FC236}">
+                  <a16:creationId xmlns:a16="http://schemas.microsoft.com/office/drawing/2014/main" id="{2CB79AC0-B131-C734-C7F1-39D1246F5F67}"/>
+                </a:ext>
+              </a:extLst>
+            </p:cNvPr>
+            <p:cNvSpPr/>
+            <p:nvPr/>
+          </p:nvSpPr>
+          <p:spPr>
+            <a:xfrm>
+              <a:off x="1479600" y="1371600"/>
+              <a:ext cx="1188000" cy="1188000"/>
+            </a:xfrm>
+            <a:prstGeom prst="ellipse">
+              <a:avLst/>
+            </a:prstGeom>
+            <a:solidFill>
+              <a:srgbClr val="45C0BF"/>
+            </a:solidFill>
+            <a:ln>
+              <a:noFill/>
+            </a:ln>
+          </p:spPr>
+          <p:style>
+            <a:lnRef idx="2">
+              <a:schemeClr val="accent1">
+                <a:shade val="15000"/>
+              </a:schemeClr>
+            </a:lnRef>
+            <a:fillRef idx="1">
+              <a:schemeClr val="accent1"/>
+            </a:fillRef>
+            <a:effectRef idx="0">
+              <a:schemeClr val="accent1"/>
+            </a:effectRef>
+            <a:fontRef idx="minor">
+              <a:schemeClr val="lt1"/>
+            </a:fontRef>
+          </p:style>
+          <p:txBody>
+            <a:bodyPr rtlCol="0" anchor="ctr"/>
+            <a:lstStyle/>
+            <a:p>
+              <a:pPr algn="ctr"/>
+              <a:endParaRPr lang="zh-CN" altLang="en-US"/>
+            </a:p>
+          </p:txBody>
+        </p:sp>
+      </p:grpSp>
+      <p:grpSp>
+        <p:nvGrpSpPr>
+          <p:cNvPr id="14" name="组合 13">
+            <a:extLst>
+              <a:ext uri="{FF2B5EF4-FFF2-40B4-BE49-F238E27FC236}">
+                <a16:creationId xmlns:a16="http://schemas.microsoft.com/office/drawing/2014/main" id="{7431BBF9-7592-12D2-DCD4-45C9FA4CB99F}"/>
+              </a:ext>
+            </a:extLst>
+          </p:cNvPr>
+          <p:cNvGrpSpPr/>
+          <p:nvPr/>
+        </p:nvGrpSpPr>
+        <p:grpSpPr>
+          <a:xfrm>
+            <a:off x="4431193" y="445075"/>
+            <a:ext cx="1440000" cy="1440000"/>
+            <a:chOff x="1353600" y="1245600"/>
+            <a:chExt cx="1440000" cy="1440000"/>
+          </a:xfrm>
+        </p:grpSpPr>
+        <p:sp>
+          <p:nvSpPr>
+            <p:cNvPr id="15" name="椭圆 14">
+              <a:extLst>
+                <a:ext uri="{FF2B5EF4-FFF2-40B4-BE49-F238E27FC236}">
+                  <a16:creationId xmlns:a16="http://schemas.microsoft.com/office/drawing/2014/main" id="{931A64D7-21C4-9E27-CA0D-ECEC452DE68D}"/>
+                </a:ext>
+              </a:extLst>
+            </p:cNvPr>
+            <p:cNvSpPr/>
+            <p:nvPr/>
+          </p:nvSpPr>
+          <p:spPr>
+            <a:xfrm>
+              <a:off x="1353600" y="1245600"/>
+              <a:ext cx="1440000" cy="1440000"/>
+            </a:xfrm>
+            <a:prstGeom prst="ellipse">
+              <a:avLst/>
+            </a:prstGeom>
+            <a:solidFill>
+              <a:srgbClr val="141311"/>
+            </a:solidFill>
+            <a:ln>
+              <a:noFill/>
+            </a:ln>
+          </p:spPr>
+          <p:style>
+            <a:lnRef idx="2">
+              <a:schemeClr val="accent1">
+                <a:shade val="15000"/>
+              </a:schemeClr>
+            </a:lnRef>
+            <a:fillRef idx="1">
+              <a:schemeClr val="accent1"/>
+            </a:fillRef>
+            <a:effectRef idx="0">
+              <a:schemeClr val="accent1"/>
+            </a:effectRef>
+            <a:fontRef idx="minor">
+              <a:schemeClr val="lt1"/>
+            </a:fontRef>
+          </p:style>
+          <p:txBody>
+            <a:bodyPr rtlCol="0" anchor="ctr"/>
+            <a:lstStyle/>
+            <a:p>
+              <a:pPr algn="ctr"/>
+              <a:endParaRPr lang="zh-CN" altLang="en-US"/>
+            </a:p>
+          </p:txBody>
+        </p:sp>
+        <p:sp>
+          <p:nvSpPr>
+            <p:cNvPr id="16" name="椭圆 15">
+              <a:extLst>
+                <a:ext uri="{FF2B5EF4-FFF2-40B4-BE49-F238E27FC236}">
+                  <a16:creationId xmlns:a16="http://schemas.microsoft.com/office/drawing/2014/main" id="{995B598A-CB15-37E0-CC11-AAD61B4538B9}"/>
+                </a:ext>
+              </a:extLst>
+            </p:cNvPr>
+            <p:cNvSpPr/>
+            <p:nvPr/>
+          </p:nvSpPr>
+          <p:spPr>
+            <a:xfrm>
+              <a:off x="1407600" y="1299600"/>
+              <a:ext cx="1332000" cy="1332000"/>
+            </a:xfrm>
+            <a:prstGeom prst="ellipse">
+              <a:avLst/>
+            </a:prstGeom>
+            <a:solidFill>
+              <a:srgbClr val="F4EFDE"/>
+            </a:solidFill>
+            <a:ln>
+              <a:noFill/>
+            </a:ln>
+          </p:spPr>
+          <p:style>
+            <a:lnRef idx="2">
+              <a:schemeClr val="accent1">
+                <a:shade val="15000"/>
+              </a:schemeClr>
+            </a:lnRef>
+            <a:fillRef idx="1">
+              <a:schemeClr val="accent1"/>
+            </a:fillRef>
+            <a:effectRef idx="0">
+              <a:schemeClr val="accent1"/>
+            </a:effectRef>
+            <a:fontRef idx="minor">
+              <a:schemeClr val="lt1"/>
+            </a:fontRef>
+          </p:style>
+          <p:txBody>
+            <a:bodyPr rtlCol="0" anchor="ctr"/>
+            <a:lstStyle/>
+            <a:p>
+              <a:pPr algn="ctr"/>
+              <a:endParaRPr lang="zh-CN" altLang="en-US"/>
+            </a:p>
+          </p:txBody>
+        </p:sp>
+        <p:sp>
+          <p:nvSpPr>
+            <p:cNvPr id="17" name="椭圆 16">
+              <a:extLst>
+                <a:ext uri="{FF2B5EF4-FFF2-40B4-BE49-F238E27FC236}">
+                  <a16:creationId xmlns:a16="http://schemas.microsoft.com/office/drawing/2014/main" id="{72ECAF23-E4CB-C35A-BBCD-FC5675C207D9}"/>
+                </a:ext>
+              </a:extLst>
+            </p:cNvPr>
+            <p:cNvSpPr/>
+            <p:nvPr/>
+          </p:nvSpPr>
+          <p:spPr>
+            <a:xfrm>
+              <a:off x="1479600" y="1371600"/>
+              <a:ext cx="1188000" cy="1188000"/>
+            </a:xfrm>
+            <a:prstGeom prst="ellipse">
+              <a:avLst/>
+            </a:prstGeom>
+            <a:solidFill>
+              <a:srgbClr val="F4B703"/>
+            </a:solidFill>
+            <a:ln>
+              <a:noFill/>
+            </a:ln>
+          </p:spPr>
+          <p:style>
+            <a:lnRef idx="2">
+              <a:schemeClr val="accent1">
+                <a:shade val="15000"/>
+              </a:schemeClr>
+            </a:lnRef>
+            <a:fillRef idx="1">
+              <a:schemeClr val="accent1"/>
+            </a:fillRef>
+            <a:effectRef idx="0">
+              <a:schemeClr val="accent1"/>
+            </a:effectRef>
+            <a:fontRef idx="minor">
+              <a:schemeClr val="lt1"/>
+            </a:fontRef>
+          </p:style>
+          <p:txBody>
+            <a:bodyPr rtlCol="0" anchor="ctr"/>
+            <a:lstStyle/>
+            <a:p>
+              <a:pPr algn="ctr"/>
+              <a:endParaRPr lang="zh-CN" altLang="en-US"/>
+            </a:p>
+          </p:txBody>
+        </p:sp>
+      </p:grpSp>
+      <p:grpSp>
+        <p:nvGrpSpPr>
+          <p:cNvPr id="19" name="组合 18">
+            <a:extLst>
+              <a:ext uri="{FF2B5EF4-FFF2-40B4-BE49-F238E27FC236}">
+                <a16:creationId xmlns:a16="http://schemas.microsoft.com/office/drawing/2014/main" id="{BC996E64-D177-765B-AAF9-B3C2FB2CFBFF}"/>
+              </a:ext>
+            </a:extLst>
+          </p:cNvPr>
+          <p:cNvGrpSpPr/>
+          <p:nvPr/>
+        </p:nvGrpSpPr>
+        <p:grpSpPr>
+          <a:xfrm>
+            <a:off x="623638" y="2444480"/>
+            <a:ext cx="720000" cy="720000"/>
+            <a:chOff x="1353600" y="1245600"/>
+            <a:chExt cx="720000" cy="720000"/>
+          </a:xfrm>
+        </p:grpSpPr>
+        <p:sp>
+          <p:nvSpPr>
+            <p:cNvPr id="20" name="椭圆 19">
+              <a:extLst>
+                <a:ext uri="{FF2B5EF4-FFF2-40B4-BE49-F238E27FC236}">
+                  <a16:creationId xmlns:a16="http://schemas.microsoft.com/office/drawing/2014/main" id="{CFA34877-A8BD-4A19-756A-7F40714624BD}"/>
+                </a:ext>
+              </a:extLst>
+            </p:cNvPr>
+            <p:cNvSpPr/>
+            <p:nvPr/>
+          </p:nvSpPr>
+          <p:spPr>
+            <a:xfrm>
+              <a:off x="1353600" y="1245600"/>
+              <a:ext cx="720000" cy="720000"/>
+            </a:xfrm>
+            <a:prstGeom prst="ellipse">
+              <a:avLst/>
+            </a:prstGeom>
+            <a:solidFill>
+              <a:srgbClr val="141311"/>
+            </a:solidFill>
+            <a:ln>
+              <a:noFill/>
+            </a:ln>
+          </p:spPr>
+          <p:style>
+            <a:lnRef idx="2">
+              <a:schemeClr val="accent1">
+                <a:shade val="15000"/>
+              </a:schemeClr>
+            </a:lnRef>
+            <a:fillRef idx="1">
+              <a:schemeClr val="accent1"/>
+            </a:fillRef>
+            <a:effectRef idx="0">
+              <a:schemeClr val="accent1"/>
+            </a:effectRef>
+            <a:fontRef idx="minor">
+              <a:schemeClr val="lt1"/>
+            </a:fontRef>
+          </p:style>
+          <p:txBody>
+            <a:bodyPr rtlCol="0" anchor="ctr"/>
+            <a:lstStyle/>
+            <a:p>
+              <a:pPr algn="ctr"/>
+              <a:endParaRPr lang="zh-CN" altLang="en-US"/>
+            </a:p>
+          </p:txBody>
+        </p:sp>
+        <p:sp>
+          <p:nvSpPr>
+            <p:cNvPr id="21" name="椭圆 20">
+              <a:extLst>
+                <a:ext uri="{FF2B5EF4-FFF2-40B4-BE49-F238E27FC236}">
+                  <a16:creationId xmlns:a16="http://schemas.microsoft.com/office/drawing/2014/main" id="{FDFB2AA1-F95A-FC7A-94D5-C407379D3C4A}"/>
+                </a:ext>
+              </a:extLst>
+            </p:cNvPr>
+            <p:cNvSpPr/>
+            <p:nvPr/>
+          </p:nvSpPr>
+          <p:spPr>
+            <a:xfrm>
+              <a:off x="1389600" y="1281600"/>
+              <a:ext cx="648000" cy="648000"/>
+            </a:xfrm>
+            <a:prstGeom prst="ellipse">
+              <a:avLst/>
+            </a:prstGeom>
+            <a:solidFill>
+              <a:srgbClr val="F4EFDE"/>
+            </a:solidFill>
+            <a:ln>
+              <a:noFill/>
+            </a:ln>
+          </p:spPr>
+          <p:style>
+            <a:lnRef idx="2">
+              <a:schemeClr val="accent1">
+                <a:shade val="15000"/>
+              </a:schemeClr>
+            </a:lnRef>
+            <a:fillRef idx="1">
+              <a:schemeClr val="accent1"/>
+            </a:fillRef>
+            <a:effectRef idx="0">
+              <a:schemeClr val="accent1"/>
+            </a:effectRef>
+            <a:fontRef idx="minor">
+              <a:schemeClr val="lt1"/>
+            </a:fontRef>
+          </p:style>
+          <p:txBody>
+            <a:bodyPr rtlCol="0" anchor="ctr"/>
+            <a:lstStyle/>
+            <a:p>
+              <a:pPr algn="ctr"/>
+              <a:endParaRPr lang="zh-CN" altLang="en-US"/>
+            </a:p>
+          </p:txBody>
+        </p:sp>
+        <p:sp>
+          <p:nvSpPr>
+            <p:cNvPr id="22" name="椭圆 21">
+              <a:extLst>
+                <a:ext uri="{FF2B5EF4-FFF2-40B4-BE49-F238E27FC236}">
+                  <a16:creationId xmlns:a16="http://schemas.microsoft.com/office/drawing/2014/main" id="{E3753C40-4576-3A60-FD98-89525498ED32}"/>
+                </a:ext>
+              </a:extLst>
+            </p:cNvPr>
+            <p:cNvSpPr/>
+            <p:nvPr/>
+          </p:nvSpPr>
+          <p:spPr>
+            <a:xfrm>
+              <a:off x="1443600" y="1335600"/>
+              <a:ext cx="540000" cy="540000"/>
+            </a:xfrm>
+            <a:prstGeom prst="ellipse">
+              <a:avLst/>
+            </a:prstGeom>
+            <a:solidFill>
+              <a:srgbClr val="F24828"/>
+            </a:solidFill>
+            <a:ln>
+              <a:noFill/>
+            </a:ln>
+          </p:spPr>
+          <p:style>
+            <a:lnRef idx="2">
+              <a:schemeClr val="accent1">
+                <a:shade val="15000"/>
+              </a:schemeClr>
+            </a:lnRef>
+            <a:fillRef idx="1">
+              <a:schemeClr val="accent1"/>
+            </a:fillRef>
+            <a:effectRef idx="0">
+              <a:schemeClr val="accent1"/>
+            </a:effectRef>
+            <a:fontRef idx="minor">
+              <a:schemeClr val="lt1"/>
+            </a:fontRef>
+          </p:style>
+          <p:txBody>
+            <a:bodyPr rtlCol="0" anchor="ctr"/>
+            <a:lstStyle/>
+            <a:p>
+              <a:pPr algn="ctr"/>
+              <a:endParaRPr lang="zh-CN" altLang="en-US"/>
+            </a:p>
+          </p:txBody>
+        </p:sp>
+      </p:grpSp>
+      <p:grpSp>
+        <p:nvGrpSpPr>
+          <p:cNvPr id="31" name="组合 30">
+            <a:extLst>
+              <a:ext uri="{FF2B5EF4-FFF2-40B4-BE49-F238E27FC236}">
+                <a16:creationId xmlns:a16="http://schemas.microsoft.com/office/drawing/2014/main" id="{32D79B46-AC52-558B-74E1-E275111BFCA4}"/>
+              </a:ext>
+            </a:extLst>
+          </p:cNvPr>
+          <p:cNvGrpSpPr/>
+          <p:nvPr/>
+        </p:nvGrpSpPr>
+        <p:grpSpPr>
+          <a:xfrm>
+            <a:off x="2515025" y="2444480"/>
+            <a:ext cx="720000" cy="720000"/>
+            <a:chOff x="1353600" y="1245600"/>
+            <a:chExt cx="720000" cy="720000"/>
+          </a:xfrm>
+        </p:grpSpPr>
+        <p:sp>
+          <p:nvSpPr>
+            <p:cNvPr id="32" name="椭圆 31">
+              <a:extLst>
+                <a:ext uri="{FF2B5EF4-FFF2-40B4-BE49-F238E27FC236}">
+                  <a16:creationId xmlns:a16="http://schemas.microsoft.com/office/drawing/2014/main" id="{2E58D6BB-BF2F-C1FA-67A2-717E1083EEBA}"/>
+                </a:ext>
+              </a:extLst>
+            </p:cNvPr>
+            <p:cNvSpPr/>
+            <p:nvPr/>
+          </p:nvSpPr>
+          <p:spPr>
+            <a:xfrm>
+              <a:off x="1353600" y="1245600"/>
+              <a:ext cx="720000" cy="720000"/>
+            </a:xfrm>
+            <a:prstGeom prst="ellipse">
+              <a:avLst/>
+            </a:prstGeom>
+            <a:solidFill>
+              <a:srgbClr val="141311"/>
+            </a:solidFill>
+            <a:ln>
+              <a:noFill/>
+            </a:ln>
+          </p:spPr>
+          <p:style>
+            <a:lnRef idx="2">
+              <a:schemeClr val="accent1">
+                <a:shade val="15000"/>
+              </a:schemeClr>
+            </a:lnRef>
+            <a:fillRef idx="1">
+              <a:schemeClr val="accent1"/>
+            </a:fillRef>
+            <a:effectRef idx="0">
+              <a:schemeClr val="accent1"/>
+            </a:effectRef>
+            <a:fontRef idx="minor">
+              <a:schemeClr val="lt1"/>
+            </a:fontRef>
+          </p:style>
+          <p:txBody>
+            <a:bodyPr rtlCol="0" anchor="ctr"/>
+            <a:lstStyle/>
+            <a:p>
+              <a:pPr algn="ctr"/>
+              <a:endParaRPr lang="zh-CN" altLang="en-US"/>
+            </a:p>
+          </p:txBody>
+        </p:sp>
+        <p:sp>
+          <p:nvSpPr>
+            <p:cNvPr id="33" name="椭圆 32">
+              <a:extLst>
+                <a:ext uri="{FF2B5EF4-FFF2-40B4-BE49-F238E27FC236}">
+                  <a16:creationId xmlns:a16="http://schemas.microsoft.com/office/drawing/2014/main" id="{16919F13-9DC7-8100-3B55-271738552ABC}"/>
+                </a:ext>
+              </a:extLst>
+            </p:cNvPr>
+            <p:cNvSpPr/>
+            <p:nvPr/>
+          </p:nvSpPr>
+          <p:spPr>
+            <a:xfrm>
+              <a:off x="1389600" y="1281600"/>
+              <a:ext cx="648000" cy="648000"/>
+            </a:xfrm>
+            <a:prstGeom prst="ellipse">
+              <a:avLst/>
+            </a:prstGeom>
+            <a:solidFill>
+              <a:srgbClr val="F4EFDE"/>
+            </a:solidFill>
+            <a:ln>
+              <a:noFill/>
+            </a:ln>
+          </p:spPr>
+          <p:style>
+            <a:lnRef idx="2">
+              <a:schemeClr val="accent1">
+                <a:shade val="15000"/>
+              </a:schemeClr>
+            </a:lnRef>
+            <a:fillRef idx="1">
+              <a:schemeClr val="accent1"/>
+            </a:fillRef>
+            <a:effectRef idx="0">
+              <a:schemeClr val="accent1"/>
+            </a:effectRef>
+            <a:fontRef idx="minor">
+              <a:schemeClr val="lt1"/>
+            </a:fontRef>
+          </p:style>
+          <p:txBody>
+            <a:bodyPr rtlCol="0" anchor="ctr"/>
+            <a:lstStyle/>
+            <a:p>
+              <a:pPr algn="ctr"/>
+              <a:endParaRPr lang="zh-CN" altLang="en-US"/>
+            </a:p>
+          </p:txBody>
+        </p:sp>
+        <p:sp>
+          <p:nvSpPr>
+            <p:cNvPr id="34" name="椭圆 33">
+              <a:extLst>
+                <a:ext uri="{FF2B5EF4-FFF2-40B4-BE49-F238E27FC236}">
+                  <a16:creationId xmlns:a16="http://schemas.microsoft.com/office/drawing/2014/main" id="{77552DD5-F74B-56C2-ED73-6E9467397E60}"/>
+                </a:ext>
+              </a:extLst>
+            </p:cNvPr>
+            <p:cNvSpPr/>
+            <p:nvPr/>
+          </p:nvSpPr>
+          <p:spPr>
+            <a:xfrm>
+              <a:off x="1443600" y="1335600"/>
+              <a:ext cx="540000" cy="540000"/>
+            </a:xfrm>
+            <a:prstGeom prst="ellipse">
+              <a:avLst/>
+            </a:prstGeom>
+            <a:solidFill>
+              <a:srgbClr val="45C0BF"/>
+            </a:solidFill>
+            <a:ln>
+              <a:noFill/>
+            </a:ln>
+          </p:spPr>
+          <p:style>
+            <a:lnRef idx="2">
+              <a:schemeClr val="accent1">
+                <a:shade val="15000"/>
+              </a:schemeClr>
+            </a:lnRef>
+            <a:fillRef idx="1">
+              <a:schemeClr val="accent1"/>
+            </a:fillRef>
+            <a:effectRef idx="0">
+              <a:schemeClr val="accent1"/>
+            </a:effectRef>
+            <a:fontRef idx="minor">
+              <a:schemeClr val="lt1"/>
+            </a:fontRef>
+          </p:style>
+          <p:txBody>
+            <a:bodyPr rtlCol="0" anchor="ctr"/>
+            <a:lstStyle/>
+            <a:p>
+              <a:pPr algn="ctr"/>
+              <a:endParaRPr lang="zh-CN" altLang="en-US"/>
+            </a:p>
+          </p:txBody>
+        </p:sp>
+      </p:grpSp>
+      <p:grpSp>
+        <p:nvGrpSpPr>
+          <p:cNvPr id="35" name="组合 34">
+            <a:extLst>
+              <a:ext uri="{FF2B5EF4-FFF2-40B4-BE49-F238E27FC236}">
+                <a16:creationId xmlns:a16="http://schemas.microsoft.com/office/drawing/2014/main" id="{0D19D9C3-D642-DD9D-250A-693003D086DD}"/>
+              </a:ext>
+            </a:extLst>
+          </p:cNvPr>
+          <p:cNvGrpSpPr/>
+          <p:nvPr/>
+        </p:nvGrpSpPr>
+        <p:grpSpPr>
+          <a:xfrm>
+            <a:off x="4431193" y="2444480"/>
+            <a:ext cx="720000" cy="720000"/>
+            <a:chOff x="1353600" y="1245600"/>
+            <a:chExt cx="720000" cy="720000"/>
+          </a:xfrm>
+        </p:grpSpPr>
+        <p:sp>
+          <p:nvSpPr>
+            <p:cNvPr id="36" name="椭圆 35">
+              <a:extLst>
+                <a:ext uri="{FF2B5EF4-FFF2-40B4-BE49-F238E27FC236}">
+                  <a16:creationId xmlns:a16="http://schemas.microsoft.com/office/drawing/2014/main" id="{6DC09E8B-1213-C572-B566-5CE24B7CEBDC}"/>
+                </a:ext>
+              </a:extLst>
+            </p:cNvPr>
+            <p:cNvSpPr/>
+            <p:nvPr/>
+          </p:nvSpPr>
+          <p:spPr>
+            <a:xfrm>
+              <a:off x="1353600" y="1245600"/>
+              <a:ext cx="720000" cy="720000"/>
+            </a:xfrm>
+            <a:prstGeom prst="ellipse">
+              <a:avLst/>
+            </a:prstGeom>
+            <a:solidFill>
+              <a:srgbClr val="141311"/>
+            </a:solidFill>
+            <a:ln>
+              <a:noFill/>
+            </a:ln>
+          </p:spPr>
+          <p:style>
+            <a:lnRef idx="2">
+              <a:schemeClr val="accent1">
+                <a:shade val="15000"/>
+              </a:schemeClr>
+            </a:lnRef>
+            <a:fillRef idx="1">
+              <a:schemeClr val="accent1"/>
+            </a:fillRef>
+            <a:effectRef idx="0">
+              <a:schemeClr val="accent1"/>
+            </a:effectRef>
+            <a:fontRef idx="minor">
+              <a:schemeClr val="lt1"/>
+            </a:fontRef>
+          </p:style>
+          <p:txBody>
+            <a:bodyPr rtlCol="0" anchor="ctr"/>
+            <a:lstStyle/>
+            <a:p>
+              <a:pPr algn="ctr"/>
+              <a:endParaRPr lang="zh-CN" altLang="en-US"/>
+            </a:p>
+          </p:txBody>
+        </p:sp>
+        <p:sp>
+          <p:nvSpPr>
+            <p:cNvPr id="37" name="椭圆 36">
+              <a:extLst>
+                <a:ext uri="{FF2B5EF4-FFF2-40B4-BE49-F238E27FC236}">
+                  <a16:creationId xmlns:a16="http://schemas.microsoft.com/office/drawing/2014/main" id="{09AA2726-0EDE-3609-D731-C232CE5ACC2F}"/>
+                </a:ext>
+              </a:extLst>
+            </p:cNvPr>
+            <p:cNvSpPr/>
+            <p:nvPr/>
+          </p:nvSpPr>
+          <p:spPr>
+            <a:xfrm>
+              <a:off x="1389600" y="1281600"/>
+              <a:ext cx="648000" cy="648000"/>
+            </a:xfrm>
+            <a:prstGeom prst="ellipse">
+              <a:avLst/>
+            </a:prstGeom>
+            <a:solidFill>
+              <a:srgbClr val="F4EFDE"/>
+            </a:solidFill>
+            <a:ln>
+              <a:noFill/>
+            </a:ln>
+          </p:spPr>
+          <p:style>
+            <a:lnRef idx="2">
+              <a:schemeClr val="accent1">
+                <a:shade val="15000"/>
+              </a:schemeClr>
+            </a:lnRef>
+            <a:fillRef idx="1">
+              <a:schemeClr val="accent1"/>
+            </a:fillRef>
+            <a:effectRef idx="0">
+              <a:schemeClr val="accent1"/>
+            </a:effectRef>
+            <a:fontRef idx="minor">
+              <a:schemeClr val="lt1"/>
+            </a:fontRef>
+          </p:style>
+          <p:txBody>
+            <a:bodyPr rtlCol="0" anchor="ctr"/>
+            <a:lstStyle/>
+            <a:p>
+              <a:pPr algn="ctr"/>
+              <a:endParaRPr lang="zh-CN" altLang="en-US"/>
+            </a:p>
+          </p:txBody>
+        </p:sp>
+        <p:sp>
+          <p:nvSpPr>
+            <p:cNvPr id="38" name="椭圆 37">
+              <a:extLst>
+                <a:ext uri="{FF2B5EF4-FFF2-40B4-BE49-F238E27FC236}">
+                  <a16:creationId xmlns:a16="http://schemas.microsoft.com/office/drawing/2014/main" id="{947009A6-7484-7895-1EB4-009400DC2F24}"/>
+                </a:ext>
+              </a:extLst>
+            </p:cNvPr>
+            <p:cNvSpPr/>
+            <p:nvPr/>
+          </p:nvSpPr>
+          <p:spPr>
+            <a:xfrm>
+              <a:off x="1443600" y="1335600"/>
+              <a:ext cx="540000" cy="540000"/>
+            </a:xfrm>
+            <a:prstGeom prst="ellipse">
+              <a:avLst/>
+            </a:prstGeom>
+            <a:solidFill>
+              <a:srgbClr val="F4B703"/>
+            </a:solidFill>
+            <a:ln>
+              <a:noFill/>
+            </a:ln>
+          </p:spPr>
+          <p:style>
+            <a:lnRef idx="2">
+              <a:schemeClr val="accent1">
+                <a:shade val="15000"/>
+              </a:schemeClr>
+            </a:lnRef>
+            <a:fillRef idx="1">
+              <a:schemeClr val="accent1"/>
+            </a:fillRef>
+            <a:effectRef idx="0">
+              <a:schemeClr val="accent1"/>
+            </a:effectRef>
+            <a:fontRef idx="minor">
+              <a:schemeClr val="lt1"/>
+            </a:fontRef>
+          </p:style>
+          <p:txBody>
+            <a:bodyPr rtlCol="0" anchor="ctr"/>
+            <a:lstStyle/>
+            <a:p>
+              <a:pPr algn="ctr"/>
+              <a:endParaRPr lang="zh-CN" altLang="en-US"/>
+            </a:p>
+          </p:txBody>
+        </p:sp>
+      </p:grpSp>
     </p:spTree>
     <p:extLst>
       <p:ext uri="{BB962C8B-B14F-4D97-AF65-F5344CB8AC3E}">

--- a/ImitationTaikoUI.pptx
+++ b/ImitationTaikoUI.pptx
@@ -262,7 +262,7 @@
           <a:p>
             <a:fld id="{AF7C0022-D722-4CC5-A0B1-D94CF606F81D}" type="datetimeFigureOut">
               <a:rPr lang="zh-CN" altLang="en-US" smtClean="0"/>
-              <a:t>2026/6/13</a:t>
+              <a:t>2026/6/16</a:t>
             </a:fld>
             <a:endParaRPr lang="zh-CN" altLang="en-US"/>
           </a:p>
@@ -460,7 +460,7 @@
           <a:p>
             <a:fld id="{AF7C0022-D722-4CC5-A0B1-D94CF606F81D}" type="datetimeFigureOut">
               <a:rPr lang="zh-CN" altLang="en-US" smtClean="0"/>
-              <a:t>2026/6/13</a:t>
+              <a:t>2026/6/16</a:t>
             </a:fld>
             <a:endParaRPr lang="zh-CN" altLang="en-US"/>
           </a:p>
@@ -668,7 +668,7 @@
           <a:p>
             <a:fld id="{AF7C0022-D722-4CC5-A0B1-D94CF606F81D}" type="datetimeFigureOut">
               <a:rPr lang="zh-CN" altLang="en-US" smtClean="0"/>
-              <a:t>2026/6/13</a:t>
+              <a:t>2026/6/16</a:t>
             </a:fld>
             <a:endParaRPr lang="zh-CN" altLang="en-US"/>
           </a:p>
@@ -866,7 +866,7 @@
           <a:p>
             <a:fld id="{AF7C0022-D722-4CC5-A0B1-D94CF606F81D}" type="datetimeFigureOut">
               <a:rPr lang="zh-CN" altLang="en-US" smtClean="0"/>
-              <a:t>2026/6/13</a:t>
+              <a:t>2026/6/16</a:t>
             </a:fld>
             <a:endParaRPr lang="zh-CN" altLang="en-US"/>
           </a:p>
@@ -1141,7 +1141,7 @@
           <a:p>
             <a:fld id="{AF7C0022-D722-4CC5-A0B1-D94CF606F81D}" type="datetimeFigureOut">
               <a:rPr lang="zh-CN" altLang="en-US" smtClean="0"/>
-              <a:t>2026/6/13</a:t>
+              <a:t>2026/6/16</a:t>
             </a:fld>
             <a:endParaRPr lang="zh-CN" altLang="en-US"/>
           </a:p>
@@ -1406,7 +1406,7 @@
           <a:p>
             <a:fld id="{AF7C0022-D722-4CC5-A0B1-D94CF606F81D}" type="datetimeFigureOut">
               <a:rPr lang="zh-CN" altLang="en-US" smtClean="0"/>
-              <a:t>2026/6/13</a:t>
+              <a:t>2026/6/16</a:t>
             </a:fld>
             <a:endParaRPr lang="zh-CN" altLang="en-US"/>
           </a:p>
@@ -1818,7 +1818,7 @@
           <a:p>
             <a:fld id="{AF7C0022-D722-4CC5-A0B1-D94CF606F81D}" type="datetimeFigureOut">
               <a:rPr lang="zh-CN" altLang="en-US" smtClean="0"/>
-              <a:t>2026/6/13</a:t>
+              <a:t>2026/6/16</a:t>
             </a:fld>
             <a:endParaRPr lang="zh-CN" altLang="en-US"/>
           </a:p>
@@ -1959,7 +1959,7 @@
           <a:p>
             <a:fld id="{AF7C0022-D722-4CC5-A0B1-D94CF606F81D}" type="datetimeFigureOut">
               <a:rPr lang="zh-CN" altLang="en-US" smtClean="0"/>
-              <a:t>2026/6/13</a:t>
+              <a:t>2026/6/16</a:t>
             </a:fld>
             <a:endParaRPr lang="zh-CN" altLang="en-US"/>
           </a:p>
@@ -2072,7 +2072,7 @@
           <a:p>
             <a:fld id="{AF7C0022-D722-4CC5-A0B1-D94CF606F81D}" type="datetimeFigureOut">
               <a:rPr lang="zh-CN" altLang="en-US" smtClean="0"/>
-              <a:t>2026/6/13</a:t>
+              <a:t>2026/6/16</a:t>
             </a:fld>
             <a:endParaRPr lang="zh-CN" altLang="en-US"/>
           </a:p>
@@ -2383,7 +2383,7 @@
           <a:p>
             <a:fld id="{AF7C0022-D722-4CC5-A0B1-D94CF606F81D}" type="datetimeFigureOut">
               <a:rPr lang="zh-CN" altLang="en-US" smtClean="0"/>
-              <a:t>2026/6/13</a:t>
+              <a:t>2026/6/16</a:t>
             </a:fld>
             <a:endParaRPr lang="zh-CN" altLang="en-US"/>
           </a:p>
@@ -2671,7 +2671,7 @@
           <a:p>
             <a:fld id="{AF7C0022-D722-4CC5-A0B1-D94CF606F81D}" type="datetimeFigureOut">
               <a:rPr lang="zh-CN" altLang="en-US" smtClean="0"/>
-              <a:t>2026/6/13</a:t>
+              <a:t>2026/6/16</a:t>
             </a:fld>
             <a:endParaRPr lang="zh-CN" altLang="en-US"/>
           </a:p>
@@ -2912,7 +2912,7 @@
           <a:p>
             <a:fld id="{AF7C0022-D722-4CC5-A0B1-D94CF606F81D}" type="datetimeFigureOut">
               <a:rPr lang="zh-CN" altLang="en-US" smtClean="0"/>
-              <a:t>2026/6/13</a:t>
+              <a:t>2026/6/16</a:t>
             </a:fld>
             <a:endParaRPr lang="zh-CN" altLang="en-US"/>
           </a:p>
@@ -11292,6 +11292,183 @@
           </p:txBody>
         </p:sp>
       </p:grpSp>
+      <p:grpSp>
+        <p:nvGrpSpPr>
+          <p:cNvPr id="5" name="组合 4">
+            <a:extLst>
+              <a:ext uri="{FF2B5EF4-FFF2-40B4-BE49-F238E27FC236}">
+                <a16:creationId xmlns:a16="http://schemas.microsoft.com/office/drawing/2014/main" id="{5F88655F-72F8-E77D-D8FE-CBA44B24B739}"/>
+              </a:ext>
+            </a:extLst>
+          </p:cNvPr>
+          <p:cNvGrpSpPr/>
+          <p:nvPr/>
+        </p:nvGrpSpPr>
+        <p:grpSpPr>
+          <a:xfrm>
+            <a:off x="6320809" y="2444480"/>
+            <a:ext cx="720000" cy="720000"/>
+            <a:chOff x="1353600" y="1245600"/>
+            <a:chExt cx="720000" cy="720000"/>
+          </a:xfrm>
+        </p:grpSpPr>
+        <p:sp>
+          <p:nvSpPr>
+            <p:cNvPr id="6" name="椭圆 5">
+              <a:extLst>
+                <a:ext uri="{FF2B5EF4-FFF2-40B4-BE49-F238E27FC236}">
+                  <a16:creationId xmlns:a16="http://schemas.microsoft.com/office/drawing/2014/main" id="{EDD726FA-E49E-8288-CE8F-F4E0E0E50F00}"/>
+                </a:ext>
+              </a:extLst>
+            </p:cNvPr>
+            <p:cNvSpPr/>
+            <p:nvPr/>
+          </p:nvSpPr>
+          <p:spPr>
+            <a:xfrm>
+              <a:off x="1353600" y="1245600"/>
+              <a:ext cx="720000" cy="720000"/>
+            </a:xfrm>
+            <a:prstGeom prst="ellipse">
+              <a:avLst/>
+            </a:prstGeom>
+            <a:solidFill>
+              <a:srgbClr val="141311"/>
+            </a:solidFill>
+            <a:ln>
+              <a:noFill/>
+            </a:ln>
+          </p:spPr>
+          <p:style>
+            <a:lnRef idx="2">
+              <a:schemeClr val="accent1">
+                <a:shade val="15000"/>
+              </a:schemeClr>
+            </a:lnRef>
+            <a:fillRef idx="1">
+              <a:schemeClr val="accent1"/>
+            </a:fillRef>
+            <a:effectRef idx="0">
+              <a:schemeClr val="accent1"/>
+            </a:effectRef>
+            <a:fontRef idx="minor">
+              <a:schemeClr val="lt1"/>
+            </a:fontRef>
+          </p:style>
+          <p:txBody>
+            <a:bodyPr rtlCol="0" anchor="ctr"/>
+            <a:lstStyle/>
+            <a:p>
+              <a:pPr algn="ctr"/>
+              <a:endParaRPr lang="zh-CN" altLang="en-US"/>
+            </a:p>
+          </p:txBody>
+        </p:sp>
+        <p:sp>
+          <p:nvSpPr>
+            <p:cNvPr id="18" name="椭圆 17">
+              <a:extLst>
+                <a:ext uri="{FF2B5EF4-FFF2-40B4-BE49-F238E27FC236}">
+                  <a16:creationId xmlns:a16="http://schemas.microsoft.com/office/drawing/2014/main" id="{4183D905-9510-48C5-1105-73B49647941F}"/>
+                </a:ext>
+              </a:extLst>
+            </p:cNvPr>
+            <p:cNvSpPr/>
+            <p:nvPr/>
+          </p:nvSpPr>
+          <p:spPr>
+            <a:xfrm>
+              <a:off x="1389600" y="1281600"/>
+              <a:ext cx="648000" cy="648000"/>
+            </a:xfrm>
+            <a:prstGeom prst="ellipse">
+              <a:avLst/>
+            </a:prstGeom>
+            <a:solidFill>
+              <a:srgbClr val="F4EFDE"/>
+            </a:solidFill>
+            <a:ln>
+              <a:noFill/>
+            </a:ln>
+          </p:spPr>
+          <p:style>
+            <a:lnRef idx="2">
+              <a:schemeClr val="accent1">
+                <a:shade val="15000"/>
+              </a:schemeClr>
+            </a:lnRef>
+            <a:fillRef idx="1">
+              <a:schemeClr val="accent1"/>
+            </a:fillRef>
+            <a:effectRef idx="0">
+              <a:schemeClr val="accent1"/>
+            </a:effectRef>
+            <a:fontRef idx="minor">
+              <a:schemeClr val="lt1"/>
+            </a:fontRef>
+          </p:style>
+          <p:txBody>
+            <a:bodyPr rtlCol="0" anchor="ctr"/>
+            <a:lstStyle/>
+            <a:p>
+              <a:pPr algn="ctr"/>
+              <a:endParaRPr lang="zh-CN" altLang="en-US"/>
+            </a:p>
+          </p:txBody>
+        </p:sp>
+        <p:sp>
+          <p:nvSpPr>
+            <p:cNvPr id="23" name="椭圆 22">
+              <a:extLst>
+                <a:ext uri="{FF2B5EF4-FFF2-40B4-BE49-F238E27FC236}">
+                  <a16:creationId xmlns:a16="http://schemas.microsoft.com/office/drawing/2014/main" id="{AE37944C-7515-08B9-13C5-09EE26EDE998}"/>
+                </a:ext>
+              </a:extLst>
+            </p:cNvPr>
+            <p:cNvSpPr/>
+            <p:nvPr/>
+          </p:nvSpPr>
+          <p:spPr>
+            <a:xfrm>
+              <a:off x="1443600" y="1335600"/>
+              <a:ext cx="540000" cy="540000"/>
+            </a:xfrm>
+            <a:prstGeom prst="ellipse">
+              <a:avLst/>
+            </a:prstGeom>
+            <a:solidFill>
+              <a:srgbClr val="FA7902"/>
+            </a:solidFill>
+            <a:ln>
+              <a:noFill/>
+            </a:ln>
+          </p:spPr>
+          <p:style>
+            <a:lnRef idx="2">
+              <a:schemeClr val="accent1">
+                <a:shade val="15000"/>
+              </a:schemeClr>
+            </a:lnRef>
+            <a:fillRef idx="1">
+              <a:schemeClr val="accent1"/>
+            </a:fillRef>
+            <a:effectRef idx="0">
+              <a:schemeClr val="accent1"/>
+            </a:effectRef>
+            <a:fontRef idx="minor">
+              <a:schemeClr val="lt1"/>
+            </a:fontRef>
+          </p:style>
+          <p:txBody>
+            <a:bodyPr rtlCol="0" anchor="ctr"/>
+            <a:lstStyle/>
+            <a:p>
+              <a:pPr algn="ctr"/>
+              <a:endParaRPr lang="zh-CN" altLang="en-US"/>
+            </a:p>
+          </p:txBody>
+        </p:sp>
+      </p:grpSp>
     </p:spTree>
     <p:extLst>
       <p:ext uri="{BB962C8B-B14F-4D97-AF65-F5344CB8AC3E}">

--- a/ImitationTaikoUI.pptx
+++ b/ImitationTaikoUI.pptx
@@ -9,6 +9,7 @@
     <p:sldId id="258" r:id="rId3"/>
     <p:sldId id="257" r:id="rId4"/>
     <p:sldId id="260" r:id="rId5"/>
+    <p:sldId id="261" r:id="rId6"/>
   </p:sldIdLst>
   <p:sldSz cx="12192000" cy="6858000"/>
   <p:notesSz cx="6858000" cy="9144000"/>
@@ -262,7 +263,7 @@
           <a:p>
             <a:fld id="{AF7C0022-D722-4CC5-A0B1-D94CF606F81D}" type="datetimeFigureOut">
               <a:rPr lang="zh-CN" altLang="en-US" smtClean="0"/>
-              <a:t>2026/6/16</a:t>
+              <a:t>2026/6/25</a:t>
             </a:fld>
             <a:endParaRPr lang="zh-CN" altLang="en-US"/>
           </a:p>
@@ -460,7 +461,7 @@
           <a:p>
             <a:fld id="{AF7C0022-D722-4CC5-A0B1-D94CF606F81D}" type="datetimeFigureOut">
               <a:rPr lang="zh-CN" altLang="en-US" smtClean="0"/>
-              <a:t>2026/6/16</a:t>
+              <a:t>2026/6/25</a:t>
             </a:fld>
             <a:endParaRPr lang="zh-CN" altLang="en-US"/>
           </a:p>
@@ -668,7 +669,7 @@
           <a:p>
             <a:fld id="{AF7C0022-D722-4CC5-A0B1-D94CF606F81D}" type="datetimeFigureOut">
               <a:rPr lang="zh-CN" altLang="en-US" smtClean="0"/>
-              <a:t>2026/6/16</a:t>
+              <a:t>2026/6/25</a:t>
             </a:fld>
             <a:endParaRPr lang="zh-CN" altLang="en-US"/>
           </a:p>
@@ -866,7 +867,7 @@
           <a:p>
             <a:fld id="{AF7C0022-D722-4CC5-A0B1-D94CF606F81D}" type="datetimeFigureOut">
               <a:rPr lang="zh-CN" altLang="en-US" smtClean="0"/>
-              <a:t>2026/6/16</a:t>
+              <a:t>2026/6/25</a:t>
             </a:fld>
             <a:endParaRPr lang="zh-CN" altLang="en-US"/>
           </a:p>
@@ -1141,7 +1142,7 @@
           <a:p>
             <a:fld id="{AF7C0022-D722-4CC5-A0B1-D94CF606F81D}" type="datetimeFigureOut">
               <a:rPr lang="zh-CN" altLang="en-US" smtClean="0"/>
-              <a:t>2026/6/16</a:t>
+              <a:t>2026/6/25</a:t>
             </a:fld>
             <a:endParaRPr lang="zh-CN" altLang="en-US"/>
           </a:p>
@@ -1406,7 +1407,7 @@
           <a:p>
             <a:fld id="{AF7C0022-D722-4CC5-A0B1-D94CF606F81D}" type="datetimeFigureOut">
               <a:rPr lang="zh-CN" altLang="en-US" smtClean="0"/>
-              <a:t>2026/6/16</a:t>
+              <a:t>2026/6/25</a:t>
             </a:fld>
             <a:endParaRPr lang="zh-CN" altLang="en-US"/>
           </a:p>
@@ -1818,7 +1819,7 @@
           <a:p>
             <a:fld id="{AF7C0022-D722-4CC5-A0B1-D94CF606F81D}" type="datetimeFigureOut">
               <a:rPr lang="zh-CN" altLang="en-US" smtClean="0"/>
-              <a:t>2026/6/16</a:t>
+              <a:t>2026/6/25</a:t>
             </a:fld>
             <a:endParaRPr lang="zh-CN" altLang="en-US"/>
           </a:p>
@@ -1959,7 +1960,7 @@
           <a:p>
             <a:fld id="{AF7C0022-D722-4CC5-A0B1-D94CF606F81D}" type="datetimeFigureOut">
               <a:rPr lang="zh-CN" altLang="en-US" smtClean="0"/>
-              <a:t>2026/6/16</a:t>
+              <a:t>2026/6/25</a:t>
             </a:fld>
             <a:endParaRPr lang="zh-CN" altLang="en-US"/>
           </a:p>
@@ -2072,7 +2073,7 @@
           <a:p>
             <a:fld id="{AF7C0022-D722-4CC5-A0B1-D94CF606F81D}" type="datetimeFigureOut">
               <a:rPr lang="zh-CN" altLang="en-US" smtClean="0"/>
-              <a:t>2026/6/16</a:t>
+              <a:t>2026/6/25</a:t>
             </a:fld>
             <a:endParaRPr lang="zh-CN" altLang="en-US"/>
           </a:p>
@@ -2383,7 +2384,7 @@
           <a:p>
             <a:fld id="{AF7C0022-D722-4CC5-A0B1-D94CF606F81D}" type="datetimeFigureOut">
               <a:rPr lang="zh-CN" altLang="en-US" smtClean="0"/>
-              <a:t>2026/6/16</a:t>
+              <a:t>2026/6/25</a:t>
             </a:fld>
             <a:endParaRPr lang="zh-CN" altLang="en-US"/>
           </a:p>
@@ -2671,7 +2672,7 @@
           <a:p>
             <a:fld id="{AF7C0022-D722-4CC5-A0B1-D94CF606F81D}" type="datetimeFigureOut">
               <a:rPr lang="zh-CN" altLang="en-US" smtClean="0"/>
-              <a:t>2026/6/16</a:t>
+              <a:t>2026/6/25</a:t>
             </a:fld>
             <a:endParaRPr lang="zh-CN" altLang="en-US"/>
           </a:p>
@@ -2912,7 +2913,7 @@
           <a:p>
             <a:fld id="{AF7C0022-D722-4CC5-A0B1-D94CF606F81D}" type="datetimeFigureOut">
               <a:rPr lang="zh-CN" altLang="en-US" smtClean="0"/>
-              <a:t>2026/6/16</a:t>
+              <a:t>2026/6/25</a:t>
             </a:fld>
             <a:endParaRPr lang="zh-CN" altLang="en-US"/>
           </a:p>
@@ -11469,10 +11470,643 @@
           </p:txBody>
         </p:sp>
       </p:grpSp>
+      <p:grpSp>
+        <p:nvGrpSpPr>
+          <p:cNvPr id="4" name="组合 3">
+            <a:extLst>
+              <a:ext uri="{FF2B5EF4-FFF2-40B4-BE49-F238E27FC236}">
+                <a16:creationId xmlns:a16="http://schemas.microsoft.com/office/drawing/2014/main" id="{29246DD1-03C1-6058-2B2A-15833904C381}"/>
+              </a:ext>
+            </a:extLst>
+          </p:cNvPr>
+          <p:cNvGrpSpPr/>
+          <p:nvPr/>
+        </p:nvGrpSpPr>
+        <p:grpSpPr>
+          <a:xfrm>
+            <a:off x="598857" y="3693521"/>
+            <a:ext cx="3052128" cy="2623458"/>
+            <a:chOff x="3561363" y="507127"/>
+            <a:chExt cx="3052128" cy="2623458"/>
+          </a:xfrm>
+        </p:grpSpPr>
+        <p:grpSp>
+          <p:nvGrpSpPr>
+            <p:cNvPr id="24" name="判定信息">
+              <a:extLst>
+                <a:ext uri="{FF2B5EF4-FFF2-40B4-BE49-F238E27FC236}">
+                  <a16:creationId xmlns:a16="http://schemas.microsoft.com/office/drawing/2014/main" id="{C56A78B4-A302-1929-47AB-204A87A7BC11}"/>
+                </a:ext>
+              </a:extLst>
+            </p:cNvPr>
+            <p:cNvGrpSpPr/>
+            <p:nvPr/>
+          </p:nvGrpSpPr>
+          <p:grpSpPr>
+            <a:xfrm>
+              <a:off x="3561363" y="507127"/>
+              <a:ext cx="3052128" cy="2623458"/>
+              <a:chOff x="2480717" y="1767113"/>
+              <a:chExt cx="3052128" cy="2623458"/>
+            </a:xfrm>
+          </p:grpSpPr>
+          <p:sp>
+            <p:nvSpPr>
+              <p:cNvPr id="42" name="矩形: 圆角 41">
+                <a:extLst>
+                  <a:ext uri="{FF2B5EF4-FFF2-40B4-BE49-F238E27FC236}">
+                    <a16:creationId xmlns:a16="http://schemas.microsoft.com/office/drawing/2014/main" id="{48CA44AA-9B61-54E8-C2D5-A08E6AB188BE}"/>
+                  </a:ext>
+                </a:extLst>
+              </p:cNvPr>
+              <p:cNvSpPr/>
+              <p:nvPr/>
+            </p:nvSpPr>
+            <p:spPr>
+              <a:xfrm>
+                <a:off x="2480717" y="1767113"/>
+                <a:ext cx="3050903" cy="2623457"/>
+              </a:xfrm>
+              <a:prstGeom prst="roundRect">
+                <a:avLst>
+                  <a:gd name="adj" fmla="val 8700"/>
+                </a:avLst>
+              </a:prstGeom>
+              <a:solidFill>
+                <a:srgbClr val="FEBD02"/>
+              </a:solidFill>
+              <a:ln w="31750">
+                <a:noFill/>
+              </a:ln>
+              <a:effectLst/>
+            </p:spPr>
+            <p:style>
+              <a:lnRef idx="2">
+                <a:schemeClr val="accent1">
+                  <a:shade val="15000"/>
+                </a:schemeClr>
+              </a:lnRef>
+              <a:fillRef idx="1">
+                <a:schemeClr val="accent1"/>
+              </a:fillRef>
+              <a:effectRef idx="0">
+                <a:schemeClr val="accent1"/>
+              </a:effectRef>
+              <a:fontRef idx="minor">
+                <a:schemeClr val="lt1"/>
+              </a:fontRef>
+            </p:style>
+            <p:txBody>
+              <a:bodyPr rtlCol="0" anchor="ctr"/>
+              <a:lstStyle/>
+              <a:p>
+                <a:pPr algn="ctr"/>
+                <a:endParaRPr lang="zh-CN" altLang="en-US"/>
+              </a:p>
+            </p:txBody>
+          </p:sp>
+          <p:sp>
+            <p:nvSpPr>
+              <p:cNvPr id="43" name="矩形: 圆角 42">
+                <a:extLst>
+                  <a:ext uri="{FF2B5EF4-FFF2-40B4-BE49-F238E27FC236}">
+                    <a16:creationId xmlns:a16="http://schemas.microsoft.com/office/drawing/2014/main" id="{6B23A3A9-AFB8-B0E9-B7BE-45590CF7AA65}"/>
+                  </a:ext>
+                </a:extLst>
+              </p:cNvPr>
+              <p:cNvSpPr/>
+              <p:nvPr/>
+            </p:nvSpPr>
+            <p:spPr>
+              <a:xfrm>
+                <a:off x="2510971" y="1798864"/>
+                <a:ext cx="2990397" cy="2562225"/>
+              </a:xfrm>
+              <a:prstGeom prst="roundRect">
+                <a:avLst>
+                  <a:gd name="adj" fmla="val 7797"/>
+                </a:avLst>
+              </a:prstGeom>
+              <a:noFill/>
+              <a:ln w="34925">
+                <a:solidFill>
+                  <a:schemeClr val="bg1"/>
+                </a:solidFill>
+              </a:ln>
+              <a:effectLst/>
+            </p:spPr>
+            <p:style>
+              <a:lnRef idx="2">
+                <a:schemeClr val="accent1">
+                  <a:shade val="15000"/>
+                </a:schemeClr>
+              </a:lnRef>
+              <a:fillRef idx="1">
+                <a:schemeClr val="accent1"/>
+              </a:fillRef>
+              <a:effectRef idx="0">
+                <a:schemeClr val="accent1"/>
+              </a:effectRef>
+              <a:fontRef idx="minor">
+                <a:schemeClr val="lt1"/>
+              </a:fontRef>
+            </p:style>
+            <p:txBody>
+              <a:bodyPr rtlCol="0" anchor="ctr"/>
+              <a:lstStyle/>
+              <a:p>
+                <a:pPr algn="ctr"/>
+                <a:endParaRPr lang="zh-CN" altLang="en-US"/>
+              </a:p>
+            </p:txBody>
+          </p:sp>
+          <p:sp>
+            <p:nvSpPr>
+              <p:cNvPr id="44" name="矩形: 圆角 43">
+                <a:extLst>
+                  <a:ext uri="{FF2B5EF4-FFF2-40B4-BE49-F238E27FC236}">
+                    <a16:creationId xmlns:a16="http://schemas.microsoft.com/office/drawing/2014/main" id="{2C6E4507-6562-79A3-7B45-C4925824CC0F}"/>
+                  </a:ext>
+                </a:extLst>
+              </p:cNvPr>
+              <p:cNvSpPr/>
+              <p:nvPr/>
+            </p:nvSpPr>
+            <p:spPr>
+              <a:xfrm>
+                <a:off x="2481942" y="1767114"/>
+                <a:ext cx="3050903" cy="2623457"/>
+              </a:xfrm>
+              <a:prstGeom prst="roundRect">
+                <a:avLst>
+                  <a:gd name="adj" fmla="val 8700"/>
+                </a:avLst>
+              </a:prstGeom>
+              <a:noFill/>
+              <a:ln w="31750">
+                <a:solidFill>
+                  <a:srgbClr val="0A0806"/>
+                </a:solidFill>
+              </a:ln>
+              <a:effectLst/>
+            </p:spPr>
+            <p:style>
+              <a:lnRef idx="2">
+                <a:schemeClr val="accent1">
+                  <a:shade val="15000"/>
+                </a:schemeClr>
+              </a:lnRef>
+              <a:fillRef idx="1">
+                <a:schemeClr val="accent1"/>
+              </a:fillRef>
+              <a:effectRef idx="0">
+                <a:schemeClr val="accent1"/>
+              </a:effectRef>
+              <a:fontRef idx="minor">
+                <a:schemeClr val="lt1"/>
+              </a:fontRef>
+            </p:style>
+            <p:txBody>
+              <a:bodyPr rtlCol="0" anchor="ctr"/>
+              <a:lstStyle/>
+              <a:p>
+                <a:pPr algn="ctr"/>
+                <a:endParaRPr lang="zh-CN" altLang="en-US"/>
+              </a:p>
+            </p:txBody>
+          </p:sp>
+        </p:grpSp>
+        <p:pic>
+          <p:nvPicPr>
+            <p:cNvPr id="25" name="图片 24">
+              <a:extLst>
+                <a:ext uri="{FF2B5EF4-FFF2-40B4-BE49-F238E27FC236}">
+                  <a16:creationId xmlns:a16="http://schemas.microsoft.com/office/drawing/2014/main" id="{75337281-6875-C24E-07BC-0C8C559AE289}"/>
+                </a:ext>
+              </a:extLst>
+            </p:cNvPr>
+            <p:cNvPicPr>
+              <a:picLocks noChangeAspect="1"/>
+            </p:cNvPicPr>
+            <p:nvPr/>
+          </p:nvPicPr>
+          <p:blipFill>
+            <a:blip r:embed="rId2">
+              <a:extLst>
+                <a:ext uri="{28A0092B-C50C-407E-A947-70E740481C1C}">
+                  <a14:useLocalDpi xmlns:a14="http://schemas.microsoft.com/office/drawing/2010/main" val="0"/>
+                </a:ext>
+              </a:extLst>
+            </a:blip>
+            <a:stretch>
+              <a:fillRect/>
+            </a:stretch>
+          </p:blipFill>
+          <p:spPr>
+            <a:xfrm>
+              <a:off x="3725035" y="738986"/>
+              <a:ext cx="1286515" cy="467824"/>
+            </a:xfrm>
+            <a:prstGeom prst="rect">
+              <a:avLst/>
+            </a:prstGeom>
+          </p:spPr>
+        </p:pic>
+        <p:sp>
+          <p:nvSpPr>
+            <p:cNvPr id="26" name="矩形: 圆角 25">
+              <a:extLst>
+                <a:ext uri="{FF2B5EF4-FFF2-40B4-BE49-F238E27FC236}">
+                  <a16:creationId xmlns:a16="http://schemas.microsoft.com/office/drawing/2014/main" id="{B4A37167-E13B-9609-F2A9-BFBCBEB0BDE8}"/>
+                </a:ext>
+              </a:extLst>
+            </p:cNvPr>
+            <p:cNvSpPr/>
+            <p:nvPr/>
+          </p:nvSpPr>
+          <p:spPr>
+            <a:xfrm>
+              <a:off x="3727483" y="1336220"/>
+              <a:ext cx="2751364" cy="309336"/>
+            </a:xfrm>
+            <a:prstGeom prst="roundRect">
+              <a:avLst>
+                <a:gd name="adj" fmla="val 50000"/>
+              </a:avLst>
+            </a:prstGeom>
+            <a:solidFill>
+              <a:srgbClr val="2B2000"/>
+            </a:solidFill>
+            <a:ln>
+              <a:noFill/>
+            </a:ln>
+          </p:spPr>
+          <p:style>
+            <a:lnRef idx="2">
+              <a:schemeClr val="accent1">
+                <a:shade val="15000"/>
+              </a:schemeClr>
+            </a:lnRef>
+            <a:fillRef idx="1">
+              <a:schemeClr val="accent1"/>
+            </a:fillRef>
+            <a:effectRef idx="0">
+              <a:schemeClr val="accent1"/>
+            </a:effectRef>
+            <a:fontRef idx="minor">
+              <a:schemeClr val="lt1"/>
+            </a:fontRef>
+          </p:style>
+          <p:txBody>
+            <a:bodyPr rtlCol="0" anchor="ctr"/>
+            <a:lstStyle/>
+            <a:p>
+              <a:pPr algn="ctr"/>
+              <a:endParaRPr lang="zh-CN" altLang="en-US"/>
+            </a:p>
+          </p:txBody>
+        </p:sp>
+        <p:sp>
+          <p:nvSpPr>
+            <p:cNvPr id="27" name="矩形: 圆角 26">
+              <a:extLst>
+                <a:ext uri="{FF2B5EF4-FFF2-40B4-BE49-F238E27FC236}">
+                  <a16:creationId xmlns:a16="http://schemas.microsoft.com/office/drawing/2014/main" id="{4A1BA6E3-6A53-CAA8-563C-CDAAAD7A3E84}"/>
+                </a:ext>
+              </a:extLst>
+            </p:cNvPr>
+            <p:cNvSpPr/>
+            <p:nvPr/>
+          </p:nvSpPr>
+          <p:spPr>
+            <a:xfrm>
+              <a:off x="3727483" y="1705008"/>
+              <a:ext cx="2751364" cy="309336"/>
+            </a:xfrm>
+            <a:prstGeom prst="roundRect">
+              <a:avLst>
+                <a:gd name="adj" fmla="val 50000"/>
+              </a:avLst>
+            </a:prstGeom>
+            <a:solidFill>
+              <a:srgbClr val="2B2000"/>
+            </a:solidFill>
+            <a:ln>
+              <a:noFill/>
+            </a:ln>
+          </p:spPr>
+          <p:style>
+            <a:lnRef idx="2">
+              <a:schemeClr val="accent1">
+                <a:shade val="15000"/>
+              </a:schemeClr>
+            </a:lnRef>
+            <a:fillRef idx="1">
+              <a:schemeClr val="accent1"/>
+            </a:fillRef>
+            <a:effectRef idx="0">
+              <a:schemeClr val="accent1"/>
+            </a:effectRef>
+            <a:fontRef idx="minor">
+              <a:schemeClr val="lt1"/>
+            </a:fontRef>
+          </p:style>
+          <p:txBody>
+            <a:bodyPr rtlCol="0" anchor="ctr"/>
+            <a:lstStyle/>
+            <a:p>
+              <a:pPr algn="ctr"/>
+              <a:endParaRPr lang="zh-CN" altLang="en-US"/>
+            </a:p>
+          </p:txBody>
+        </p:sp>
+        <p:sp>
+          <p:nvSpPr>
+            <p:cNvPr id="28" name="矩形: 圆角 27">
+              <a:extLst>
+                <a:ext uri="{FF2B5EF4-FFF2-40B4-BE49-F238E27FC236}">
+                  <a16:creationId xmlns:a16="http://schemas.microsoft.com/office/drawing/2014/main" id="{0FCF2EDA-E62F-7F0E-737E-04D3B873C868}"/>
+                </a:ext>
+              </a:extLst>
+            </p:cNvPr>
+            <p:cNvSpPr/>
+            <p:nvPr/>
+          </p:nvSpPr>
+          <p:spPr>
+            <a:xfrm>
+              <a:off x="3725035" y="2069418"/>
+              <a:ext cx="2751364" cy="309336"/>
+            </a:xfrm>
+            <a:prstGeom prst="roundRect">
+              <a:avLst>
+                <a:gd name="adj" fmla="val 50000"/>
+              </a:avLst>
+            </a:prstGeom>
+            <a:solidFill>
+              <a:srgbClr val="2B2000"/>
+            </a:solidFill>
+            <a:ln>
+              <a:noFill/>
+            </a:ln>
+          </p:spPr>
+          <p:style>
+            <a:lnRef idx="2">
+              <a:schemeClr val="accent1">
+                <a:shade val="15000"/>
+              </a:schemeClr>
+            </a:lnRef>
+            <a:fillRef idx="1">
+              <a:schemeClr val="accent1"/>
+            </a:fillRef>
+            <a:effectRef idx="0">
+              <a:schemeClr val="accent1"/>
+            </a:effectRef>
+            <a:fontRef idx="minor">
+              <a:schemeClr val="lt1"/>
+            </a:fontRef>
+          </p:style>
+          <p:txBody>
+            <a:bodyPr rtlCol="0" anchor="ctr"/>
+            <a:lstStyle/>
+            <a:p>
+              <a:pPr algn="ctr"/>
+              <a:endParaRPr lang="zh-CN" altLang="en-US"/>
+            </a:p>
+          </p:txBody>
+        </p:sp>
+        <p:sp>
+          <p:nvSpPr>
+            <p:cNvPr id="29" name="矩形: 圆角 28">
+              <a:extLst>
+                <a:ext uri="{FF2B5EF4-FFF2-40B4-BE49-F238E27FC236}">
+                  <a16:creationId xmlns:a16="http://schemas.microsoft.com/office/drawing/2014/main" id="{CF680FF7-956B-7252-A985-A10E6DAE1E04}"/>
+                </a:ext>
+              </a:extLst>
+            </p:cNvPr>
+            <p:cNvSpPr/>
+            <p:nvPr/>
+          </p:nvSpPr>
+          <p:spPr>
+            <a:xfrm>
+              <a:off x="3725035" y="2662357"/>
+              <a:ext cx="1857626" cy="309336"/>
+            </a:xfrm>
+            <a:prstGeom prst="roundRect">
+              <a:avLst>
+                <a:gd name="adj" fmla="val 50000"/>
+              </a:avLst>
+            </a:prstGeom>
+            <a:solidFill>
+              <a:srgbClr val="B58D15"/>
+            </a:solidFill>
+            <a:ln>
+              <a:noFill/>
+            </a:ln>
+          </p:spPr>
+          <p:style>
+            <a:lnRef idx="2">
+              <a:schemeClr val="accent1">
+                <a:shade val="15000"/>
+              </a:schemeClr>
+            </a:lnRef>
+            <a:fillRef idx="1">
+              <a:schemeClr val="accent1"/>
+            </a:fillRef>
+            <a:effectRef idx="0">
+              <a:schemeClr val="accent1"/>
+            </a:effectRef>
+            <a:fontRef idx="minor">
+              <a:schemeClr val="lt1"/>
+            </a:fontRef>
+          </p:style>
+          <p:txBody>
+            <a:bodyPr rtlCol="0" anchor="ctr"/>
+            <a:lstStyle/>
+            <a:p>
+              <a:pPr algn="ctr"/>
+              <a:endParaRPr lang="zh-CN" altLang="en-US"/>
+            </a:p>
+          </p:txBody>
+        </p:sp>
+        <p:pic>
+          <p:nvPicPr>
+            <p:cNvPr id="30" name="图片 29">
+              <a:extLst>
+                <a:ext uri="{FF2B5EF4-FFF2-40B4-BE49-F238E27FC236}">
+                  <a16:creationId xmlns:a16="http://schemas.microsoft.com/office/drawing/2014/main" id="{CA011812-F3CE-FA26-5867-5290A748EE2A}"/>
+                </a:ext>
+              </a:extLst>
+            </p:cNvPr>
+            <p:cNvPicPr>
+              <a:picLocks noChangeAspect="1"/>
+            </p:cNvPicPr>
+            <p:nvPr/>
+          </p:nvPicPr>
+          <p:blipFill>
+            <a:blip r:embed="rId3">
+              <a:extLst>
+                <a:ext uri="{28A0092B-C50C-407E-A947-70E740481C1C}">
+                  <a14:useLocalDpi xmlns:a14="http://schemas.microsoft.com/office/drawing/2010/main" val="0"/>
+                </a:ext>
+              </a:extLst>
+            </a:blip>
+            <a:stretch>
+              <a:fillRect/>
+            </a:stretch>
+          </p:blipFill>
+          <p:spPr>
+            <a:xfrm>
+              <a:off x="4082795" y="1621015"/>
+              <a:ext cx="375800" cy="387423"/>
+            </a:xfrm>
+            <a:prstGeom prst="rect">
+              <a:avLst/>
+            </a:prstGeom>
+          </p:spPr>
+        </p:pic>
+        <p:pic>
+          <p:nvPicPr>
+            <p:cNvPr id="39" name="图片 38">
+              <a:extLst>
+                <a:ext uri="{FF2B5EF4-FFF2-40B4-BE49-F238E27FC236}">
+                  <a16:creationId xmlns:a16="http://schemas.microsoft.com/office/drawing/2014/main" id="{638FB43B-CB0E-7C60-F7F3-28761F9DDA99}"/>
+                </a:ext>
+              </a:extLst>
+            </p:cNvPr>
+            <p:cNvPicPr>
+              <a:picLocks noChangeAspect="1"/>
+            </p:cNvPicPr>
+            <p:nvPr/>
+          </p:nvPicPr>
+          <p:blipFill>
+            <a:blip r:embed="rId4">
+              <a:extLst>
+                <a:ext uri="{28A0092B-C50C-407E-A947-70E740481C1C}">
+                  <a14:useLocalDpi xmlns:a14="http://schemas.microsoft.com/office/drawing/2010/main" val="0"/>
+                </a:ext>
+              </a:extLst>
+            </a:blip>
+            <a:stretch>
+              <a:fillRect/>
+            </a:stretch>
+          </p:blipFill>
+          <p:spPr>
+            <a:xfrm>
+              <a:off x="3723810" y="1983897"/>
+              <a:ext cx="765618" cy="391621"/>
+            </a:xfrm>
+            <a:prstGeom prst="rect">
+              <a:avLst/>
+            </a:prstGeom>
+          </p:spPr>
+        </p:pic>
+        <p:pic>
+          <p:nvPicPr>
+            <p:cNvPr id="40" name="图片 39">
+              <a:extLst>
+                <a:ext uri="{FF2B5EF4-FFF2-40B4-BE49-F238E27FC236}">
+                  <a16:creationId xmlns:a16="http://schemas.microsoft.com/office/drawing/2014/main" id="{086AA4CD-A113-61E7-7A2E-29EE84B5C7B7}"/>
+                </a:ext>
+              </a:extLst>
+            </p:cNvPr>
+            <p:cNvPicPr>
+              <a:picLocks noChangeAspect="1"/>
+            </p:cNvPicPr>
+            <p:nvPr/>
+          </p:nvPicPr>
+          <p:blipFill>
+            <a:blip r:embed="rId5">
+              <a:extLst>
+                <a:ext uri="{28A0092B-C50C-407E-A947-70E740481C1C}">
+                  <a14:useLocalDpi xmlns:a14="http://schemas.microsoft.com/office/drawing/2010/main" val="0"/>
+                </a:ext>
+              </a:extLst>
+            </a:blip>
+            <a:stretch>
+              <a:fillRect/>
+            </a:stretch>
+          </p:blipFill>
+          <p:spPr>
+            <a:xfrm>
+              <a:off x="3732870" y="2578272"/>
+              <a:ext cx="747497" cy="393419"/>
+            </a:xfrm>
+            <a:prstGeom prst="rect">
+              <a:avLst/>
+            </a:prstGeom>
+          </p:spPr>
+        </p:pic>
+        <p:pic>
+          <p:nvPicPr>
+            <p:cNvPr id="41" name="图片 40">
+              <a:extLst>
+                <a:ext uri="{FF2B5EF4-FFF2-40B4-BE49-F238E27FC236}">
+                  <a16:creationId xmlns:a16="http://schemas.microsoft.com/office/drawing/2014/main" id="{7189422C-DB37-5C85-9A0F-CD4B8CD9B6FC}"/>
+                </a:ext>
+              </a:extLst>
+            </p:cNvPr>
+            <p:cNvPicPr>
+              <a:picLocks noChangeAspect="1"/>
+            </p:cNvPicPr>
+            <p:nvPr/>
+          </p:nvPicPr>
+          <p:blipFill>
+            <a:blip r:embed="rId6">
+              <a:extLst>
+                <a:ext uri="{28A0092B-C50C-407E-A947-70E740481C1C}">
+                  <a14:useLocalDpi xmlns:a14="http://schemas.microsoft.com/office/drawing/2010/main" val="0"/>
+                </a:ext>
+              </a:extLst>
+            </a:blip>
+            <a:stretch>
+              <a:fillRect/>
+            </a:stretch>
+          </p:blipFill>
+          <p:spPr>
+            <a:xfrm>
+              <a:off x="4097590" y="1251370"/>
+              <a:ext cx="346210" cy="393420"/>
+            </a:xfrm>
+            <a:prstGeom prst="rect">
+              <a:avLst/>
+            </a:prstGeom>
+          </p:spPr>
+        </p:pic>
+      </p:grpSp>
     </p:spTree>
     <p:extLst>
       <p:ext uri="{BB962C8B-B14F-4D97-AF65-F5344CB8AC3E}">
         <p14:creationId xmlns:p14="http://schemas.microsoft.com/office/powerpoint/2010/main" val="3476532484"/>
+      </p:ext>
+    </p:extLst>
+  </p:cSld>
+  <p:clrMapOvr>
+    <a:masterClrMapping/>
+  </p:clrMapOvr>
+</p:sld>
+</file>
+
+<file path=ppt/slides/slide5.xml><?xml version="1.0" encoding="utf-8"?>
+<p:sld xmlns:a="http://schemas.openxmlformats.org/drawingml/2006/main" xmlns:r="http://schemas.openxmlformats.org/officeDocument/2006/relationships" xmlns:p="http://schemas.openxmlformats.org/presentationml/2006/main">
+  <p:cSld>
+    <p:spTree>
+      <p:nvGrpSpPr>
+        <p:cNvPr id="1" name=""/>
+        <p:cNvGrpSpPr/>
+        <p:nvPr/>
+      </p:nvGrpSpPr>
+      <p:grpSpPr>
+        <a:xfrm>
+          <a:off x="0" y="0"/>
+          <a:ext cx="0" cy="0"/>
+          <a:chOff x="0" y="0"/>
+          <a:chExt cx="0" cy="0"/>
+        </a:xfrm>
+      </p:grpSpPr>
+    </p:spTree>
+    <p:extLst>
+      <p:ext uri="{BB962C8B-B14F-4D97-AF65-F5344CB8AC3E}">
+        <p14:creationId xmlns:p14="http://schemas.microsoft.com/office/powerpoint/2010/main" val="3008419970"/>
       </p:ext>
     </p:extLst>
   </p:cSld>
